--- a/test-corpus/word-verification/gantt.pptx
+++ b/test-corpus/word-verification/gantt.pptx
@@ -144,8 +144,8 @@
         </p:nvSpPr>
         <p:spPr>
           <a:xfrm>
-            <a:off x="457200" y="2180665"/>
-            <a:ext cx="11277600" cy="442259"/>
+            <a:off x="457200" y="2757813"/>
+            <a:ext cx="7034784" cy="275874"/>
           </a:xfrm>
           <a:prstGeom prst="rect">
             <a:avLst/>
@@ -168,7 +168,7 @@
               </a:spcAft>
             </a:pPr>
             <a:r>
-              <a:rPr lang="en-US" b="1" sz="2031" dirty="0">
+              <a:rPr lang="en-US" b="1" sz="1250" dirty="0">
                 <a:solidFill>
                   <a:srgbClr val="000000"/>
                 </a:solidFill>
@@ -186,8 +186,8 @@
         </p:nvSpPr>
         <p:spPr>
           <a:xfrm>
-            <a:off x="3912347" y="2982259"/>
-            <a:ext cx="304053" cy="2266576"/>
+            <a:off x="2612465" y="3257834"/>
+            <a:ext cx="189663" cy="1413854"/>
           </a:xfrm>
           <a:prstGeom prst="rect">
             <a:avLst/>
@@ -208,8 +208,8 @@
         </p:nvSpPr>
         <p:spPr>
           <a:xfrm>
-            <a:off x="4216400" y="2982259"/>
-            <a:ext cx="304053" cy="2266576"/>
+            <a:off x="2802128" y="3257834"/>
+            <a:ext cx="189663" cy="1413854"/>
           </a:xfrm>
           <a:prstGeom prst="rect">
             <a:avLst/>
@@ -230,8 +230,8 @@
         </p:nvSpPr>
         <p:spPr>
           <a:xfrm>
-            <a:off x="6040718" y="2982259"/>
-            <a:ext cx="304053" cy="2266576"/>
+            <a:off x="3940108" y="3257834"/>
+            <a:ext cx="189663" cy="1413854"/>
           </a:xfrm>
           <a:prstGeom prst="rect">
             <a:avLst/>
@@ -252,8 +252,8 @@
         </p:nvSpPr>
         <p:spPr>
           <a:xfrm>
-            <a:off x="6344771" y="2982259"/>
-            <a:ext cx="304053" cy="2266576"/>
+            <a:off x="4129771" y="3257834"/>
+            <a:ext cx="189663" cy="1413854"/>
           </a:xfrm>
           <a:prstGeom prst="rect">
             <a:avLst/>
@@ -274,8 +274,8 @@
         </p:nvSpPr>
         <p:spPr>
           <a:xfrm>
-            <a:off x="8169088" y="2982259"/>
-            <a:ext cx="304053" cy="2266576"/>
+            <a:off x="5267751" y="3257834"/>
+            <a:ext cx="189663" cy="1413854"/>
           </a:xfrm>
           <a:prstGeom prst="rect">
             <a:avLst/>
@@ -296,8 +296,8 @@
         </p:nvSpPr>
         <p:spPr>
           <a:xfrm>
-            <a:off x="8473141" y="2982259"/>
-            <a:ext cx="304053" cy="2266576"/>
+            <a:off x="5457414" y="3257834"/>
+            <a:ext cx="189663" cy="1413854"/>
           </a:xfrm>
           <a:prstGeom prst="rect">
             <a:avLst/>
@@ -318,8 +318,8 @@
         </p:nvSpPr>
         <p:spPr>
           <a:xfrm>
-            <a:off x="10297459" y="2982259"/>
-            <a:ext cx="304053" cy="2266576"/>
+            <a:off x="6595394" y="3257834"/>
+            <a:ext cx="189663" cy="1413854"/>
           </a:xfrm>
           <a:prstGeom prst="rect">
             <a:avLst/>
@@ -340,8 +340,8 @@
         </p:nvSpPr>
         <p:spPr>
           <a:xfrm>
-            <a:off x="10601512" y="2982259"/>
-            <a:ext cx="304053" cy="2266576"/>
+            <a:off x="6785057" y="3257834"/>
+            <a:ext cx="189663" cy="1413854"/>
           </a:xfrm>
           <a:prstGeom prst="rect">
             <a:avLst/>
@@ -362,8 +362,8 @@
         </p:nvSpPr>
         <p:spPr>
           <a:xfrm>
-            <a:off x="2392082" y="2982259"/>
-            <a:ext cx="13821" cy="2266576"/>
+            <a:off x="1664148" y="3257834"/>
+            <a:ext cx="8621" cy="1413854"/>
           </a:xfrm>
           <a:prstGeom prst="rect">
             <a:avLst/>
@@ -384,8 +384,8 @@
         </p:nvSpPr>
         <p:spPr>
           <a:xfrm>
-            <a:off x="2392082" y="2678206"/>
-            <a:ext cx="1216212" cy="304053"/>
+            <a:off x="1664148" y="3068171"/>
+            <a:ext cx="758653" cy="189663"/>
           </a:xfrm>
           <a:prstGeom prst="rect">
             <a:avLst/>
@@ -408,7 +408,7 @@
               </a:spcAft>
             </a:pPr>
             <a:r>
-              <a:rPr lang="en-US" sz="1016" dirty="0">
+              <a:rPr lang="en-US" sz="650" dirty="0">
                 <a:solidFill>
                   <a:srgbClr val="595959"/>
                 </a:solidFill>
@@ -426,8 +426,8 @@
         </p:nvSpPr>
         <p:spPr>
           <a:xfrm>
-            <a:off x="4520453" y="2982259"/>
-            <a:ext cx="13821" cy="2266576"/>
+            <a:off x="2991791" y="3257834"/>
+            <a:ext cx="8621" cy="1413854"/>
           </a:xfrm>
           <a:prstGeom prst="rect">
             <a:avLst/>
@@ -448,8 +448,8 @@
         </p:nvSpPr>
         <p:spPr>
           <a:xfrm>
-            <a:off x="4520453" y="2678206"/>
-            <a:ext cx="1216212" cy="304053"/>
+            <a:off x="2991791" y="3068171"/>
+            <a:ext cx="758653" cy="189663"/>
           </a:xfrm>
           <a:prstGeom prst="rect">
             <a:avLst/>
@@ -472,7 +472,7 @@
               </a:spcAft>
             </a:pPr>
             <a:r>
-              <a:rPr lang="en-US" sz="1016" dirty="0">
+              <a:rPr lang="en-US" sz="650" dirty="0">
                 <a:solidFill>
                   <a:srgbClr val="595959"/>
                 </a:solidFill>
@@ -490,8 +490,8 @@
         </p:nvSpPr>
         <p:spPr>
           <a:xfrm>
-            <a:off x="6648824" y="2982259"/>
-            <a:ext cx="13821" cy="2266576"/>
+            <a:off x="4319434" y="3257834"/>
+            <a:ext cx="8621" cy="1413854"/>
           </a:xfrm>
           <a:prstGeom prst="rect">
             <a:avLst/>
@@ -512,8 +512,8 @@
         </p:nvSpPr>
         <p:spPr>
           <a:xfrm>
-            <a:off x="6648824" y="2678206"/>
-            <a:ext cx="1216212" cy="304053"/>
+            <a:off x="4319434" y="3068171"/>
+            <a:ext cx="758653" cy="189663"/>
           </a:xfrm>
           <a:prstGeom prst="rect">
             <a:avLst/>
@@ -536,7 +536,7 @@
               </a:spcAft>
             </a:pPr>
             <a:r>
-              <a:rPr lang="en-US" sz="1016" dirty="0">
+              <a:rPr lang="en-US" sz="650" dirty="0">
                 <a:solidFill>
                   <a:srgbClr val="595959"/>
                 </a:solidFill>
@@ -554,8 +554,8 @@
         </p:nvSpPr>
         <p:spPr>
           <a:xfrm>
-            <a:off x="8777194" y="2982259"/>
-            <a:ext cx="13821" cy="2266576"/>
+            <a:off x="5647077" y="3257834"/>
+            <a:ext cx="8621" cy="1413854"/>
           </a:xfrm>
           <a:prstGeom prst="rect">
             <a:avLst/>
@@ -576,8 +576,8 @@
         </p:nvSpPr>
         <p:spPr>
           <a:xfrm>
-            <a:off x="8777194" y="2678206"/>
-            <a:ext cx="1216212" cy="304053"/>
+            <a:off x="5647077" y="3068171"/>
+            <a:ext cx="758653" cy="189663"/>
           </a:xfrm>
           <a:prstGeom prst="rect">
             <a:avLst/>
@@ -600,7 +600,7 @@
               </a:spcAft>
             </a:pPr>
             <a:r>
-              <a:rPr lang="en-US" sz="1016" dirty="0">
+              <a:rPr lang="en-US" sz="650" dirty="0">
                 <a:solidFill>
                   <a:srgbClr val="595959"/>
                 </a:solidFill>
@@ -618,8 +618,8 @@
         </p:nvSpPr>
         <p:spPr>
           <a:xfrm>
-            <a:off x="10905565" y="2982259"/>
-            <a:ext cx="13821" cy="2266576"/>
+            <a:off x="6974720" y="3257834"/>
+            <a:ext cx="8621" cy="1413854"/>
           </a:xfrm>
           <a:prstGeom prst="rect">
             <a:avLst/>
@@ -640,8 +640,8 @@
         </p:nvSpPr>
         <p:spPr>
           <a:xfrm>
-            <a:off x="10905565" y="2678206"/>
-            <a:ext cx="1216212" cy="304053"/>
+            <a:off x="6974720" y="3068171"/>
+            <a:ext cx="758653" cy="189663"/>
           </a:xfrm>
           <a:prstGeom prst="rect">
             <a:avLst/>
@@ -664,7 +664,7 @@
               </a:spcAft>
             </a:pPr>
             <a:r>
-              <a:rPr lang="en-US" sz="1016" dirty="0">
+              <a:rPr lang="en-US" sz="650" dirty="0">
                 <a:solidFill>
                   <a:srgbClr val="595959"/>
                 </a:solidFill>
@@ -682,14 +682,14 @@
         </p:nvSpPr>
         <p:spPr>
           <a:xfrm>
-            <a:off x="2392082" y="2982259"/>
-            <a:ext cx="9121588" cy="2266576"/>
+            <a:off x="1664148" y="3257834"/>
+            <a:ext cx="5689899" cy="1413854"/>
           </a:xfrm>
           <a:prstGeom prst="rect">
             <a:avLst/>
           </a:prstGeom>
           <a:noFill/>
-          <a:ln w="9214">
+          <a:ln w="6350">
             <a:solidFill>
               <a:srgbClr val="BFBFBF"/>
             </a:solidFill>
@@ -704,8 +704,8 @@
         </p:nvSpPr>
         <p:spPr>
           <a:xfrm>
-            <a:off x="457200" y="2982259"/>
-            <a:ext cx="11277600" cy="304053"/>
+            <a:off x="457200" y="3257834"/>
+            <a:ext cx="7034784" cy="189663"/>
           </a:xfrm>
           <a:prstGeom prst="rect">
             <a:avLst/>
@@ -726,8 +726,8 @@
         </p:nvSpPr>
         <p:spPr>
           <a:xfrm>
-            <a:off x="540124" y="3009900"/>
-            <a:ext cx="1769035" cy="248771"/>
+            <a:off x="508926" y="3275077"/>
+            <a:ext cx="1103496" cy="155179"/>
           </a:xfrm>
           <a:prstGeom prst="rect">
             <a:avLst/>
@@ -750,7 +750,7 @@
               </a:spcAft>
             </a:pPr>
             <a:r>
-              <a:rPr lang="en-US" b="1" sz="1161" dirty="0">
+              <a:rPr lang="en-US" b="1" sz="700" dirty="0">
                 <a:solidFill>
                   <a:srgbClr val="000000"/>
                 </a:solidFill>
@@ -768,8 +768,8 @@
         </p:nvSpPr>
         <p:spPr>
           <a:xfrm>
-            <a:off x="540124" y="3313953"/>
-            <a:ext cx="1796676" cy="276412"/>
+            <a:off x="508926" y="3464740"/>
+            <a:ext cx="1120738" cy="172421"/>
           </a:xfrm>
           <a:prstGeom prst="rect">
             <a:avLst/>
@@ -792,7 +792,7 @@
               </a:spcAft>
             </a:pPr>
             <a:r>
-              <a:rPr lang="en-US" sz="1088" dirty="0">
+              <a:rPr lang="en-US" sz="700" dirty="0">
                 <a:solidFill>
                   <a:srgbClr val="000000"/>
                 </a:solidFill>
@@ -810,8 +810,8 @@
         </p:nvSpPr>
         <p:spPr>
           <a:xfrm>
-            <a:off x="2392082" y="3341594"/>
-            <a:ext cx="2128371" cy="221129"/>
+            <a:off x="1664148" y="3481982"/>
+            <a:ext cx="1327643" cy="137937"/>
           </a:xfrm>
           <a:prstGeom prst="roundRect">
             <a:avLst/>
@@ -819,7 +819,7 @@
           <a:solidFill>
             <a:srgbClr val="A6A6A6"/>
           </a:solidFill>
-          <a:ln w="9214">
+          <a:ln w="6350">
             <a:solidFill>
               <a:srgbClr val="595959"/>
             </a:solidFill>
@@ -834,8 +834,8 @@
         </p:nvSpPr>
         <p:spPr>
           <a:xfrm>
-            <a:off x="540124" y="3645647"/>
-            <a:ext cx="1796676" cy="276412"/>
+            <a:off x="508926" y="3671645"/>
+            <a:ext cx="1120738" cy="172421"/>
           </a:xfrm>
           <a:prstGeom prst="rect">
             <a:avLst/>
@@ -858,7 +858,7 @@
               </a:spcAft>
             </a:pPr>
             <a:r>
-              <a:rPr lang="en-US" sz="1088" dirty="0">
+              <a:rPr lang="en-US" sz="700" dirty="0">
                 <a:solidFill>
                   <a:srgbClr val="000000"/>
                 </a:solidFill>
@@ -876,8 +876,8 @@
         </p:nvSpPr>
         <p:spPr>
           <a:xfrm>
-            <a:off x="4520453" y="3673288"/>
-            <a:ext cx="912159" cy="221129"/>
+            <a:off x="2991791" y="3688887"/>
+            <a:ext cx="568990" cy="137937"/>
           </a:xfrm>
           <a:prstGeom prst="roundRect">
             <a:avLst/>
@@ -885,7 +885,7 @@
           <a:solidFill>
             <a:srgbClr val="FFC000"/>
           </a:solidFill>
-          <a:ln w="9214">
+          <a:ln w="6350">
             <a:solidFill>
               <a:srgbClr val="595959"/>
             </a:solidFill>
@@ -900,8 +900,8 @@
         </p:nvSpPr>
         <p:spPr>
           <a:xfrm>
-            <a:off x="457200" y="3949700"/>
-            <a:ext cx="11277600" cy="304053"/>
+            <a:off x="457200" y="3861309"/>
+            <a:ext cx="7034784" cy="189663"/>
           </a:xfrm>
           <a:prstGeom prst="rect">
             <a:avLst/>
@@ -922,8 +922,8 @@
         </p:nvSpPr>
         <p:spPr>
           <a:xfrm>
-            <a:off x="540124" y="3977341"/>
-            <a:ext cx="1769035" cy="248771"/>
+            <a:off x="508926" y="3878551"/>
+            <a:ext cx="1103496" cy="155179"/>
           </a:xfrm>
           <a:prstGeom prst="rect">
             <a:avLst/>
@@ -946,7 +946,7 @@
               </a:spcAft>
             </a:pPr>
             <a:r>
-              <a:rPr lang="en-US" b="1" sz="1161" dirty="0">
+              <a:rPr lang="en-US" b="1" sz="700" dirty="0">
                 <a:solidFill>
                   <a:srgbClr val="000000"/>
                 </a:solidFill>
@@ -964,8 +964,8 @@
         </p:nvSpPr>
         <p:spPr>
           <a:xfrm>
-            <a:off x="540124" y="4281394"/>
-            <a:ext cx="1796676" cy="276412"/>
+            <a:off x="508926" y="4068214"/>
+            <a:ext cx="1120738" cy="172421"/>
           </a:xfrm>
           <a:prstGeom prst="rect">
             <a:avLst/>
@@ -988,7 +988,7 @@
               </a:spcAft>
             </a:pPr>
             <a:r>
-              <a:rPr lang="en-US" sz="1088" dirty="0">
+              <a:rPr lang="en-US" sz="700" dirty="0">
                 <a:solidFill>
                   <a:srgbClr val="000000"/>
                 </a:solidFill>
@@ -1006,8 +1006,8 @@
         </p:nvSpPr>
         <p:spPr>
           <a:xfrm>
-            <a:off x="5432612" y="4309035"/>
-            <a:ext cx="1824318" cy="221129"/>
+            <a:off x="3560781" y="4085456"/>
+            <a:ext cx="1137980" cy="137937"/>
           </a:xfrm>
           <a:prstGeom prst="roundRect">
             <a:avLst/>
@@ -1015,7 +1015,7 @@
           <a:solidFill>
             <a:srgbClr val="C00000"/>
           </a:solidFill>
-          <a:ln w="9214">
+          <a:ln w="6350">
             <a:solidFill>
               <a:srgbClr val="595959"/>
             </a:solidFill>
@@ -1030,8 +1030,8 @@
         </p:nvSpPr>
         <p:spPr>
           <a:xfrm>
-            <a:off x="540124" y="4613088"/>
-            <a:ext cx="1796676" cy="276412"/>
+            <a:off x="508926" y="4275119"/>
+            <a:ext cx="1120738" cy="172421"/>
           </a:xfrm>
           <a:prstGeom prst="rect">
             <a:avLst/>
@@ -1054,7 +1054,7 @@
               </a:spcAft>
             </a:pPr>
             <a:r>
-              <a:rPr lang="en-US" sz="1088" dirty="0">
+              <a:rPr lang="en-US" sz="700" dirty="0">
                 <a:solidFill>
                   <a:srgbClr val="000000"/>
                 </a:solidFill>
@@ -1072,8 +1072,8 @@
         </p:nvSpPr>
         <p:spPr>
           <a:xfrm>
-            <a:off x="7146365" y="4640729"/>
-            <a:ext cx="221129" cy="221129"/>
+            <a:off x="4629792" y="4292361"/>
+            <a:ext cx="137937" cy="137937"/>
           </a:xfrm>
           <a:prstGeom prst="diamond">
             <a:avLst/>
@@ -1081,7 +1081,7 @@
           <a:solidFill>
             <a:srgbClr val="C00000"/>
           </a:solidFill>
-          <a:ln w="9214">
+          <a:ln w="6350">
             <a:solidFill>
               <a:srgbClr val="595959"/>
             </a:solidFill>
@@ -1096,8 +1096,8 @@
         </p:nvSpPr>
         <p:spPr>
           <a:xfrm>
-            <a:off x="540124" y="4944782"/>
-            <a:ext cx="1796676" cy="276412"/>
+            <a:off x="508926" y="4482025"/>
+            <a:ext cx="1120738" cy="172421"/>
           </a:xfrm>
           <a:prstGeom prst="rect">
             <a:avLst/>
@@ -1120,7 +1120,7 @@
               </a:spcAft>
             </a:pPr>
             <a:r>
-              <a:rPr lang="en-US" sz="1088" dirty="0">
+              <a:rPr lang="en-US" sz="700" dirty="0">
                 <a:solidFill>
                   <a:srgbClr val="000000"/>
                 </a:solidFill>
@@ -1138,8 +1138,8 @@
         </p:nvSpPr>
         <p:spPr>
           <a:xfrm>
-            <a:off x="7256929" y="4972424"/>
-            <a:ext cx="4256741" cy="221129"/>
+            <a:off x="4698761" y="4499267"/>
+            <a:ext cx="2655286" cy="137937"/>
           </a:xfrm>
           <a:prstGeom prst="roundRect">
             <a:avLst/>
@@ -1147,12 +1147,185 @@
           <a:solidFill>
             <a:srgbClr val="4472C4"/>
           </a:solidFill>
-          <a:ln w="9214">
+          <a:ln w="6350">
             <a:solidFill>
               <a:srgbClr val="595959"/>
             </a:solidFill>
           </a:ln>
         </p:spPr>
+      </p:sp>
+      <p:sp>
+        <p:nvSpPr>
+          <p:cNvPr id="4" name="Mermaid source"/>
+          <p:cNvSpPr/>
+          <p:nvPr/>
+        </p:nvSpPr>
+        <p:spPr>
+          <a:xfrm>
+            <a:off x="7674864" y="1028700"/>
+            <a:ext cx="4059936" cy="5372100"/>
+          </a:xfrm>
+          <a:prstGeom prst="rect">
+            <a:avLst/>
+          </a:prstGeom>
+          <a:solidFill>
+            <a:srgbClr val="F3F4F6"/>
+          </a:solidFill>
+          <a:ln w="9525">
+            <a:solidFill>
+              <a:srgbClr val="D1D5DB"/>
+            </a:solidFill>
+          </a:ln>
+        </p:spPr>
+        <p:txBody>
+          <a:bodyPr wrap="square" lIns="91440" tIns="45720" rIns="91440" bIns="45720" anchor="t">
+            <a:noAutofit/>
+          </a:bodyPr>
+          <a:lstStyle/>
+          <a:p>
+            <a:pPr algn="l"/>
+            <a:r>
+              <a:rPr lang="en-US" sz="1400" dirty="0">
+                <a:solidFill>
+                  <a:srgbClr val="1F2937"/>
+                </a:solidFill>
+                <a:latin typeface="Consolas"/>
+                <a:cs typeface="Consolas"/>
+              </a:rPr>
+              <a:t>gantt</a:t>
+            </a:r>
+          </a:p>
+          <a:p>
+            <a:pPr algn="l"/>
+            <a:r>
+              <a:rPr lang="en-US" sz="1400" dirty="0">
+                <a:solidFill>
+                  <a:srgbClr val="1F2937"/>
+                </a:solidFill>
+                <a:latin typeface="Consolas"/>
+                <a:cs typeface="Consolas"/>
+              </a:rPr>
+              <a:t>    title Adoption d'un logiciel</a:t>
+            </a:r>
+          </a:p>
+          <a:p>
+            <a:pPr algn="l"/>
+            <a:r>
+              <a:rPr lang="en-US" sz="1400" dirty="0">
+                <a:solidFill>
+                  <a:srgbClr val="1F2937"/>
+                </a:solidFill>
+                <a:latin typeface="Consolas"/>
+                <a:cs typeface="Consolas"/>
+              </a:rPr>
+              <a:t>    dateFormat YYYY-MM-DD</a:t>
+            </a:r>
+          </a:p>
+          <a:p>
+            <a:pPr algn="l"/>
+            <a:r>
+              <a:rPr lang="en-US" sz="1400" dirty="0">
+                <a:solidFill>
+                  <a:srgbClr val="1F2937"/>
+                </a:solidFill>
+                <a:latin typeface="Consolas"/>
+                <a:cs typeface="Consolas"/>
+              </a:rPr>
+              <a:t>    excludes weekends</a:t>
+            </a:r>
+          </a:p>
+          <a:p>
+            <a:pPr algn="l"/>
+            <a:r>
+              <a:rPr lang="en-US" sz="1400" dirty="0">
+                <a:solidFill>
+                  <a:srgbClr val="1F2937"/>
+                </a:solidFill>
+                <a:latin typeface="Consolas"/>
+                <a:cs typeface="Consolas"/>
+              </a:rPr>
+              <a:t>    section Cadrage</a:t>
+            </a:r>
+          </a:p>
+          <a:p>
+            <a:pPr algn="l"/>
+            <a:r>
+              <a:rPr lang="en-US" sz="1400" dirty="0">
+                <a:solidFill>
+                  <a:srgbClr val="1F2937"/>
+                </a:solidFill>
+                <a:latin typeface="Consolas"/>
+                <a:cs typeface="Consolas"/>
+              </a:rPr>
+              <a:t>    Recueil besoins      :done,    des1, 2026-01-05, 5d</a:t>
+            </a:r>
+          </a:p>
+          <a:p>
+            <a:pPr algn="l"/>
+            <a:r>
+              <a:rPr lang="en-US" sz="1400" dirty="0">
+                <a:solidFill>
+                  <a:srgbClr val="1F2937"/>
+                </a:solidFill>
+                <a:latin typeface="Consolas"/>
+                <a:cs typeface="Consolas"/>
+              </a:rPr>
+              <a:t>    Choix outil          :active,  des2, after des1, 3d</a:t>
+            </a:r>
+          </a:p>
+          <a:p>
+            <a:pPr algn="l"/>
+            <a:r>
+              <a:rPr lang="en-US" sz="1400" dirty="0">
+                <a:solidFill>
+                  <a:srgbClr val="1F2937"/>
+                </a:solidFill>
+                <a:latin typeface="Consolas"/>
+                <a:cs typeface="Consolas"/>
+              </a:rPr>
+              <a:t>    section Deploiement</a:t>
+            </a:r>
+          </a:p>
+          <a:p>
+            <a:pPr algn="l"/>
+            <a:r>
+              <a:rPr lang="en-US" sz="1400" dirty="0">
+                <a:solidFill>
+                  <a:srgbClr val="1F2937"/>
+                </a:solidFill>
+                <a:latin typeface="Consolas"/>
+                <a:cs typeface="Consolas"/>
+              </a:rPr>
+              <a:t>    Formation            :crit,    des3, after des2, 4d</a:t>
+            </a:r>
+          </a:p>
+          <a:p>
+            <a:pPr algn="l"/>
+            <a:r>
+              <a:rPr lang="en-US" sz="1400" dirty="0">
+                <a:solidFill>
+                  <a:srgbClr val="1F2937"/>
+                </a:solidFill>
+                <a:latin typeface="Consolas"/>
+                <a:cs typeface="Consolas"/>
+              </a:rPr>
+              <a:t>    Go-live              :milestone, des4, after des3, 0d</a:t>
+            </a:r>
+          </a:p>
+          <a:p>
+            <a:pPr algn="l"/>
+            <a:r>
+              <a:rPr lang="en-US" sz="1400" dirty="0">
+                <a:solidFill>
+                  <a:srgbClr val="1F2937"/>
+                </a:solidFill>
+                <a:latin typeface="Consolas"/>
+                <a:cs typeface="Consolas"/>
+              </a:rPr>
+              <a:t>    Suivi post go-live   :         des5, after des4, 10d</a:t>
+            </a:r>
+          </a:p>
+        </p:txBody>
       </p:sp>
     </p:spTree>
   </p:cSld>
